--- a/slides/week04/ch04_speeds_engine.pptx
+++ b/slides/week04/ch04_speeds_engine.pptx
@@ -25,6 +25,7 @@
     <p:sldId id="273" r:id="rId24"/>
     <p:sldId id="274" r:id="rId25"/>
     <p:sldId id="275" r:id="rId26"/>
+    <p:sldId id="276" r:id="rId27"/>
   </p:sldIdLst>
   <p:notesMasterIdLst>
     <p:notesMasterId r:id="rId15"/>
@@ -590,7 +591,7 @@
           <a:lstStyle/>
           <a:p>
             <a:r>
-              <a:t>서버가 없으면 이 부분은 건너뛴다. 이 장의 나머지와 5장 이후는 서버 없이 진행된다.</a:t>
+              <a:t>세 가지 모두 직접 구현하지 않는다. 필요할 때 HTTP로 호출한다. 축약 계층은 3장 끝에서 예고한 그 방법이다.</a:t>
             </a:r>
           </a:p>
         </p:txBody>
@@ -660,7 +661,7 @@
           <a:lstStyle/>
           <a:p>
             <a:r>
-              <a:t>자유류 속도만 쓰는 시뮬레이션은 언제나 실제보다 낙관적인 결과를 낸다. 이 한 문장이 오늘의 결론이다.</a:t>
+              <a:t>서버가 없으면 이 부분은 건너뛴다. 이 장의 나머지와 5장 이후는 서버 없이 진행된다.</a:t>
             </a:r>
           </a:p>
         </p:txBody>
@@ -730,6 +731,76 @@
           <a:lstStyle/>
           <a:p>
             <a:r>
+              <a:t>자유류 속도만 쓰는 시뮬레이션은 언제나 실제보다 낙관적인 결과를 낸다. 이 한 문장이 오늘의 결론이다.</a:t>
+            </a:r>
+          </a:p>
+        </p:txBody>
+      </p:sp>
+      <p:sp>
+        <p:nvSpPr>
+          <p:cNvPr id="4" name="Slide Number Placeholder 3"/>
+          <p:cNvSpPr>
+            <a:spLocks noGrp="1"/>
+          </p:cNvSpPr>
+          <p:nvPr>
+            <p:ph type="sldNum" idx="5" sz="quarter"/>
+          </p:nvPr>
+        </p:nvSpPr>
+        <p:spPr/>
+      </p:sp>
+    </p:spTree>
+  </p:cSld>
+  <p:clrMapOvr>
+    <a:masterClrMapping/>
+  </p:clrMapOvr>
+</p:notes>
+</file>
+
+<file path=ppt/notesSlides/notesSlide13.xml><?xml version="1.0" encoding="utf-8"?>
+<p:notes xmlns:a="http://schemas.openxmlformats.org/drawingml/2006/main" xmlns:p="http://schemas.openxmlformats.org/presentationml/2006/main" xmlns:r="http://schemas.openxmlformats.org/officeDocument/2006/relationships">
+  <p:cSld>
+    <p:spTree>
+      <p:nvGrpSpPr>
+        <p:cNvPr id="1" name=""/>
+        <p:cNvGrpSpPr/>
+        <p:nvPr/>
+      </p:nvGrpSpPr>
+      <p:grpSpPr>
+        <a:xfrm>
+          <a:off x="0" y="0"/>
+          <a:ext cx="0" cy="0"/>
+          <a:chOff x="0" y="0"/>
+          <a:chExt cx="0" cy="0"/>
+        </a:xfrm>
+      </p:grpSpPr>
+      <p:sp>
+        <p:nvSpPr>
+          <p:cNvPr id="2" name="Slide Image Placeholder 1"/>
+          <p:cNvSpPr>
+            <a:spLocks noGrp="1"/>
+          </p:cNvSpPr>
+          <p:nvPr>
+            <p:ph type="sldImg" idx="2"/>
+          </p:nvPr>
+        </p:nvSpPr>
+        <p:spPr/>
+      </p:sp>
+      <p:sp>
+        <p:nvSpPr>
+          <p:cNvPr id="3" name="Notes Placeholder 2"/>
+          <p:cNvSpPr>
+            <a:spLocks noGrp="1"/>
+          </p:cNvSpPr>
+          <p:nvPr>
+            <p:ph type="body" idx="3" sz="quarter"/>
+          </p:nvPr>
+        </p:nvSpPr>
+        <p:spPr/>
+        <p:txBody>
+          <a:bodyPr/>
+          <a:lstStyle/>
+          <a:p>
+            <a:r>
               <a:t>연습 4.3은 경로를 이동하는 동안 시각이 지나 시간대가 바뀌는 경우까지 반영한다. 오후 6시 50분에 출발해 7시를 지나는 상황이 예시다.</a:t>
             </a:r>
           </a:p>
@@ -940,7 +1011,7 @@
           <a:lstStyle/>
           <a:p>
             <a:r>
-              <a:t>2장에서 엣지 표를 확인할 때 지나쳤던 컬럼들이다. 교재에서 컬럼 목록을 다시 출력해 보여준다.</a:t>
+              <a:t>슬라이드는 개요만 다룬다. 세부 내용과 코드는 교재 원고와 실습 노트북에서 확인한다. 교재 저장소는 비공개이므로 초대받은 계정으로 로그인한 상태여야 주소가 열린다.</a:t>
             </a:r>
           </a:p>
         </p:txBody>
@@ -1010,7 +1081,7 @@
           <a:lstStyle/>
           <a:p>
             <a:r>
-              <a:t>비워 두면 그 도로를 아예 사용할 수 없게 되므로 더 나쁘다. 결측이 이면도로에 몰려 있다는 점이 자유류 대체를 그럭저럭 타당하게 만든다. 연습 4.2에서 다른 대체 방식과 비교한다.</a:t>
+              <a:t>2장에서 엣지 표를 확인할 때 지나쳤던 컬럼들이다. 교재에서 컬럼 목록을 다시 출력해 보여준다.</a:t>
             </a:r>
           </a:p>
         </p:txBody>
@@ -1080,7 +1151,7 @@
           <a:lstStyle/>
           <a:p>
             <a:r>
-              <a:t>심야 7분 58초와 오후 첨두 8분 59초도 1분 차이가 난다. 하루 종일 같은 속도로 시뮬레이션하면 저녁 배차가 실제보다 잘 되는 것처럼 나온다.</a:t>
+              <a:t>비워 두면 그 도로를 아예 사용할 수 없게 되므로 더 나쁘다. 결측이 이면도로에 몰려 있다는 점이 자유류 대체를 그럭저럭 타당하게 만든다. 연습 4.2에서 다른 대체 방식과 비교한다.</a:t>
             </a:r>
           </a:p>
         </p:txBody>
@@ -1150,7 +1221,7 @@
           <a:lstStyle/>
           <a:p>
             <a:r>
-              <a:t>최단경로를 미리 계산해 저장하면 되지 않느냐는 질문이 자연스럽게 나온다. 시뮬레이터는 이 문제를 다르게 해결하고, 4.5절에서 그 방법을 다룬다.</a:t>
+              <a:t>심야 7분 58초와 오후 첨두 8분 59초도 1분 차이가 난다. 하루 종일 같은 속도로 시뮬레이션하면 저녁 배차가 실제보다 잘 되는 것처럼 나온다.</a:t>
             </a:r>
           </a:p>
         </p:txBody>
@@ -1220,7 +1291,7 @@
           <a:lstStyle/>
           <a:p>
             <a:r>
-              <a:t>파일럿 프로젝트에서 파라미터를 비교하려면 이 속도로는 부족하다. 다음 절의 엔진이 이 문제를 해결한다.</a:t>
+              <a:t>최단경로를 미리 계산해 저장하면 되지 않느냐는 질문이 자연스럽게 나온다. 시뮬레이터는 이 문제를 다르게 해결하고, 4.5절에서 그 방법을 다룬다.</a:t>
             </a:r>
           </a:p>
         </p:txBody>
@@ -1290,7 +1361,7 @@
           <a:lstStyle/>
           <a:p>
             <a:r>
-              <a:t>세 가지 모두 직접 구현하지 않는다. 필요할 때 HTTP로 호출한다. 축약 계층은 3장 끝에서 예고한 그 방법이다.</a:t>
+              <a:t>파일럿 프로젝트에서 파라미터를 비교하려면 이 속도로는 부족하다. 다음 절의 엔진이 이 문제를 해결한다.</a:t>
             </a:r>
           </a:p>
         </p:txBody>
@@ -4925,6 +4996,118 @@
       <p:grpSpPr/>
       <p:sp>
         <p:nvSpPr>
+          <p:cNvPr id="2" name="Text Placeholder 1"/>
+          <p:cNvSpPr>
+            <a:spLocks noGrp="1"/>
+          </p:cNvSpPr>
+          <p:nvPr>
+            <p:ph type="body" idx="100"/>
+          </p:nvPr>
+        </p:nvSpPr>
+        <p:spPr/>
+        <p:txBody>
+          <a:bodyPr/>
+          <a:lstStyle/>
+          <a:p>
+            <a:r>
+              <a:t>03</a:t>
+            </a:r>
+          </a:p>
+        </p:txBody>
+      </p:sp>
+      <p:sp>
+        <p:nvSpPr>
+          <p:cNvPr id="3" name="Title 2"/>
+          <p:cNvSpPr>
+            <a:spLocks noGrp="1"/>
+          </p:cNvSpPr>
+          <p:nvPr>
+            <p:ph type="title" idx="101"/>
+          </p:nvPr>
+        </p:nvSpPr>
+        <p:spPr/>
+        <p:txBody>
+          <a:bodyPr/>
+          <a:lstStyle/>
+          <a:p>
+            <a:r>
+              <a:t>교재 4.2–4.3 소요시간과 경로 변화</a:t>
+            </a:r>
+          </a:p>
+        </p:txBody>
+      </p:sp>
+      <p:sp>
+        <p:nvSpPr>
+          <p:cNvPr id="4" name="Text Placeholder 3"/>
+          <p:cNvSpPr>
+            <a:spLocks noGrp="1"/>
+          </p:cNvSpPr>
+          <p:nvPr>
+            <p:ph type="body" idx="102"/>
+          </p:nvPr>
+        </p:nvSpPr>
+        <p:spPr/>
+        <p:txBody>
+          <a:bodyPr/>
+          <a:lstStyle/>
+          <a:p>
+            <a:pPr>
+              <a:spcAft>
+                <a:spcPts val="1000"/>
+              </a:spcAft>
+            </a:pPr>
+            <a:r>
+              <a:rPr>
+                <a:solidFill>
+                  <a:srgbClr val="AFAFAF"/>
+                </a:solidFill>
+              </a:rPr>
+              <a:t>3.1  </a:t>
+            </a:r>
+            <a:r>
+              <a:t>시간대별 소요시간</a:t>
+            </a:r>
+          </a:p>
+          <a:p>
+            <a:pPr>
+              <a:spcAft>
+                <a:spcPts val="1000"/>
+              </a:spcAft>
+            </a:pPr>
+            <a:r>
+              <a:rPr>
+                <a:solidFill>
+                  <a:srgbClr val="AFAFAF"/>
+                </a:solidFill>
+              </a:rPr>
+              <a:t>3.2  </a:t>
+            </a:r>
+            <a:r>
+              <a:t>경로 자체의 변화</a:t>
+            </a:r>
+          </a:p>
+        </p:txBody>
+      </p:sp>
+    </p:spTree>
+  </p:cSld>
+  <p:clrMapOvr>
+    <a:masterClrMapping/>
+  </p:clrMapOvr>
+</p:sld>
+</file>
+
+<file path=ppt/slides/slide11.xml><?xml version="1.0" encoding="utf-8"?>
+<p:sld xmlns:a="http://schemas.openxmlformats.org/drawingml/2006/main" xmlns:p="http://schemas.openxmlformats.org/presentationml/2006/main" xmlns:r="http://schemas.openxmlformats.org/officeDocument/2006/relationships">
+  <p:cSld>
+    <p:spTree>
+      <p:nvGrpSpPr>
+        <p:cNvPr id="1" name=""/>
+        <p:cNvGrpSpPr/>
+        <p:nvPr/>
+      </p:nvGrpSpPr>
+      <p:grpSpPr/>
+      <p:sp>
+        <p:nvSpPr>
           <p:cNvPr id="2" name="Title 1"/>
           <p:cNvSpPr>
             <a:spLocks noGrp="1"/>
@@ -5100,7 +5283,7 @@
 </p:sld>
 </file>
 
-<file path=ppt/slides/slide11.xml><?xml version="1.0" encoding="utf-8"?>
+<file path=ppt/slides/slide12.xml><?xml version="1.0" encoding="utf-8"?>
 <p:sld xmlns:a="http://schemas.openxmlformats.org/drawingml/2006/main" xmlns:p="http://schemas.openxmlformats.org/presentationml/2006/main" xmlns:r="http://schemas.openxmlformats.org/officeDocument/2006/relationships">
   <p:cSld>
     <p:spTree>
@@ -5237,100 +5420,6 @@
               <a:t>1004</a:t>
             </a:fld>
             <a:endParaRPr lang="en-US"/>
-          </a:p>
-        </p:txBody>
-      </p:sp>
-    </p:spTree>
-  </p:cSld>
-  <p:clrMapOvr>
-    <a:masterClrMapping/>
-  </p:clrMapOvr>
-</p:sld>
-</file>
-
-<file path=ppt/slides/slide12.xml><?xml version="1.0" encoding="utf-8"?>
-<p:sld xmlns:a="http://schemas.openxmlformats.org/drawingml/2006/main" xmlns:p="http://schemas.openxmlformats.org/presentationml/2006/main" xmlns:r="http://schemas.openxmlformats.org/officeDocument/2006/relationships">
-  <p:cSld>
-    <p:spTree>
-      <p:nvGrpSpPr>
-        <p:cNvPr id="1" name=""/>
-        <p:cNvGrpSpPr/>
-        <p:nvPr/>
-      </p:nvGrpSpPr>
-      <p:grpSpPr/>
-      <p:sp>
-        <p:nvSpPr>
-          <p:cNvPr id="2" name="Text Placeholder 1"/>
-          <p:cNvSpPr>
-            <a:spLocks noGrp="1"/>
-          </p:cNvSpPr>
-          <p:nvPr>
-            <p:ph type="body" idx="100"/>
-          </p:nvPr>
-        </p:nvSpPr>
-        <p:spPr/>
-        <p:txBody>
-          <a:bodyPr/>
-          <a:lstStyle/>
-          <a:p>
-            <a:r>
-              <a:t>04</a:t>
-            </a:r>
-          </a:p>
-        </p:txBody>
-      </p:sp>
-      <p:sp>
-        <p:nvSpPr>
-          <p:cNvPr id="3" name="Title 2"/>
-          <p:cNvSpPr>
-            <a:spLocks noGrp="1"/>
-          </p:cNvSpPr>
-          <p:nvPr>
-            <p:ph type="title" idx="101"/>
-          </p:nvPr>
-        </p:nvSpPr>
-        <p:spPr/>
-        <p:txBody>
-          <a:bodyPr/>
-          <a:lstStyle/>
-          <a:p>
-            <a:r>
-              <a:t>교재 4.4 질의 횟수</a:t>
-            </a:r>
-          </a:p>
-        </p:txBody>
-      </p:sp>
-      <p:sp>
-        <p:nvSpPr>
-          <p:cNvPr id="4" name="Text Placeholder 3"/>
-          <p:cNvSpPr>
-            <a:spLocks noGrp="1"/>
-          </p:cNvSpPr>
-          <p:nvPr>
-            <p:ph type="body" idx="102"/>
-          </p:nvPr>
-        </p:nvSpPr>
-        <p:spPr/>
-        <p:txBody>
-          <a:bodyPr/>
-          <a:lstStyle/>
-          <a:p>
-            <a:pPr>
-              <a:spcAft>
-                <a:spcPts val="1000"/>
-              </a:spcAft>
-            </a:pPr>
-            <a:r>
-              <a:rPr>
-                <a:solidFill>
-                  <a:srgbClr val="AFAFAF"/>
-                </a:solidFill>
-              </a:rPr>
-              <a:t>4.1  </a:t>
-            </a:r>
-            <a:r>
-              <a:t>시뮬레이션 1회의 질의 수</a:t>
-            </a:r>
           </a:p>
         </p:txBody>
       </p:sp>
@@ -5354,6 +5443,100 @@
       <p:grpSpPr/>
       <p:sp>
         <p:nvSpPr>
+          <p:cNvPr id="2" name="Text Placeholder 1"/>
+          <p:cNvSpPr>
+            <a:spLocks noGrp="1"/>
+          </p:cNvSpPr>
+          <p:nvPr>
+            <p:ph type="body" idx="100"/>
+          </p:nvPr>
+        </p:nvSpPr>
+        <p:spPr/>
+        <p:txBody>
+          <a:bodyPr/>
+          <a:lstStyle/>
+          <a:p>
+            <a:r>
+              <a:t>04</a:t>
+            </a:r>
+          </a:p>
+        </p:txBody>
+      </p:sp>
+      <p:sp>
+        <p:nvSpPr>
+          <p:cNvPr id="3" name="Title 2"/>
+          <p:cNvSpPr>
+            <a:spLocks noGrp="1"/>
+          </p:cNvSpPr>
+          <p:nvPr>
+            <p:ph type="title" idx="101"/>
+          </p:nvPr>
+        </p:nvSpPr>
+        <p:spPr/>
+        <p:txBody>
+          <a:bodyPr/>
+          <a:lstStyle/>
+          <a:p>
+            <a:r>
+              <a:t>교재 4.4 질의 횟수</a:t>
+            </a:r>
+          </a:p>
+        </p:txBody>
+      </p:sp>
+      <p:sp>
+        <p:nvSpPr>
+          <p:cNvPr id="4" name="Text Placeholder 3"/>
+          <p:cNvSpPr>
+            <a:spLocks noGrp="1"/>
+          </p:cNvSpPr>
+          <p:nvPr>
+            <p:ph type="body" idx="102"/>
+          </p:nvPr>
+        </p:nvSpPr>
+        <p:spPr/>
+        <p:txBody>
+          <a:bodyPr/>
+          <a:lstStyle/>
+          <a:p>
+            <a:pPr>
+              <a:spcAft>
+                <a:spcPts val="1000"/>
+              </a:spcAft>
+            </a:pPr>
+            <a:r>
+              <a:rPr>
+                <a:solidFill>
+                  <a:srgbClr val="AFAFAF"/>
+                </a:solidFill>
+              </a:rPr>
+              <a:t>4.1  </a:t>
+            </a:r>
+            <a:r>
+              <a:t>시뮬레이션 1회의 질의 수</a:t>
+            </a:r>
+          </a:p>
+        </p:txBody>
+      </p:sp>
+    </p:spTree>
+  </p:cSld>
+  <p:clrMapOvr>
+    <a:masterClrMapping/>
+  </p:clrMapOvr>
+</p:sld>
+</file>
+
+<file path=ppt/slides/slide14.xml><?xml version="1.0" encoding="utf-8"?>
+<p:sld xmlns:a="http://schemas.openxmlformats.org/drawingml/2006/main" xmlns:p="http://schemas.openxmlformats.org/presentationml/2006/main" xmlns:r="http://schemas.openxmlformats.org/officeDocument/2006/relationships">
+  <p:cSld>
+    <p:spTree>
+      <p:nvGrpSpPr>
+        <p:cNvPr id="1" name=""/>
+        <p:cNvGrpSpPr/>
+        <p:nvPr/>
+      </p:nvGrpSpPr>
+      <p:grpSpPr/>
+      <p:sp>
+        <p:nvSpPr>
           <p:cNvPr id="2" name="Title 1"/>
           <p:cNvSpPr>
             <a:spLocks noGrp="1"/>
@@ -5444,7 +5627,7 @@
           <a:lstStyle/>
           <a:p>
             <a:r>
-              <a:t>표 2. 하남시 저녁 시뮬레이션 1회의 라우팅 질의량</a:t>
+              <a:t>표 3. 하남시 저녁 시뮬레이션 1회의 라우팅 질의량</a:t>
             </a:r>
           </a:p>
         </p:txBody>
@@ -5897,118 +6080,6 @@
 </p:sld>
 </file>
 
-<file path=ppt/slides/slide14.xml><?xml version="1.0" encoding="utf-8"?>
-<p:sld xmlns:a="http://schemas.openxmlformats.org/drawingml/2006/main" xmlns:p="http://schemas.openxmlformats.org/presentationml/2006/main" xmlns:r="http://schemas.openxmlformats.org/officeDocument/2006/relationships">
-  <p:cSld>
-    <p:spTree>
-      <p:nvGrpSpPr>
-        <p:cNvPr id="1" name=""/>
-        <p:cNvGrpSpPr/>
-        <p:nvPr/>
-      </p:nvGrpSpPr>
-      <p:grpSpPr/>
-      <p:sp>
-        <p:nvSpPr>
-          <p:cNvPr id="2" name="Text Placeholder 1"/>
-          <p:cNvSpPr>
-            <a:spLocks noGrp="1"/>
-          </p:cNvSpPr>
-          <p:nvPr>
-            <p:ph type="body" idx="100"/>
-          </p:nvPr>
-        </p:nvSpPr>
-        <p:spPr/>
-        <p:txBody>
-          <a:bodyPr/>
-          <a:lstStyle/>
-          <a:p>
-            <a:r>
-              <a:t>05</a:t>
-            </a:r>
-          </a:p>
-        </p:txBody>
-      </p:sp>
-      <p:sp>
-        <p:nvSpPr>
-          <p:cNvPr id="3" name="Title 2"/>
-          <p:cNvSpPr>
-            <a:spLocks noGrp="1"/>
-          </p:cNvSpPr>
-          <p:nvPr>
-            <p:ph type="title" idx="101"/>
-          </p:nvPr>
-        </p:nvSpPr>
-        <p:spPr/>
-        <p:txBody>
-          <a:bodyPr/>
-          <a:lstStyle/>
-          <a:p>
-            <a:r>
-              <a:t>교재 4.5 실제 엔진</a:t>
-            </a:r>
-          </a:p>
-        </p:txBody>
-      </p:sp>
-      <p:sp>
-        <p:nvSpPr>
-          <p:cNvPr id="4" name="Text Placeholder 3"/>
-          <p:cNvSpPr>
-            <a:spLocks noGrp="1"/>
-          </p:cNvSpPr>
-          <p:nvPr>
-            <p:ph type="body" idx="102"/>
-          </p:nvPr>
-        </p:nvSpPr>
-        <p:spPr/>
-        <p:txBody>
-          <a:bodyPr/>
-          <a:lstStyle/>
-          <a:p>
-            <a:pPr>
-              <a:spcAft>
-                <a:spcPts val="1000"/>
-              </a:spcAft>
-            </a:pPr>
-            <a:r>
-              <a:rPr>
-                <a:solidFill>
-                  <a:srgbClr val="AFAFAF"/>
-                </a:solidFill>
-              </a:rPr>
-              <a:t>5.1  </a:t>
-            </a:r>
-            <a:r>
-              <a:t>엔진이 다르게 하는 세 가지</a:t>
-            </a:r>
-          </a:p>
-          <a:p>
-            <a:pPr>
-              <a:spcAft>
-                <a:spcPts val="1000"/>
-              </a:spcAft>
-            </a:pPr>
-            <a:r>
-              <a:rPr>
-                <a:solidFill>
-                  <a:srgbClr val="AFAFAF"/>
-                </a:solidFill>
-              </a:rPr>
-              <a:t>5.2  </a:t>
-            </a:r>
-            <a:r>
-              <a:t>우리 구현과의 대조</a:t>
-            </a:r>
-          </a:p>
-        </p:txBody>
-      </p:sp>
-    </p:spTree>
-  </p:cSld>
-  <p:clrMapOvr>
-    <a:masterClrMapping/>
-  </p:clrMapOvr>
-</p:sld>
-</file>
-
 <file path=ppt/slides/slide15.xml><?xml version="1.0" encoding="utf-8"?>
 <p:sld xmlns:a="http://schemas.openxmlformats.org/drawingml/2006/main" xmlns:p="http://schemas.openxmlformats.org/presentationml/2006/main" xmlns:r="http://schemas.openxmlformats.org/officeDocument/2006/relationships">
   <p:cSld>
@@ -6021,12 +6092,12 @@
       <p:grpSpPr/>
       <p:sp>
         <p:nvSpPr>
-          <p:cNvPr id="2" name="Title 1"/>
-          <p:cNvSpPr>
-            <a:spLocks noGrp="1"/>
-          </p:cNvSpPr>
-          <p:nvPr>
-            <p:ph type="title" idx="100"/>
+          <p:cNvPr id="2" name="Text Placeholder 1"/>
+          <p:cNvSpPr>
+            <a:spLocks noGrp="1"/>
+          </p:cNvSpPr>
+          <p:nvPr>
+            <p:ph type="body" idx="100"/>
           </p:nvPr>
         </p:nvSpPr>
         <p:spPr/>
@@ -6035,19 +6106,19 @@
           <a:lstStyle/>
           <a:p>
             <a:r>
-              <a:t>5.1 엔진이 다르게 하는 세 가지</a:t>
-            </a:r>
-          </a:p>
-        </p:txBody>
-      </p:sp>
-      <p:sp>
-        <p:nvSpPr>
-          <p:cNvPr id="3" name="Text Placeholder 2"/>
-          <p:cNvSpPr>
-            <a:spLocks noGrp="1"/>
-          </p:cNvSpPr>
-          <p:nvPr>
-            <p:ph type="body" idx="101"/>
+              <a:t>05</a:t>
+            </a:r>
+          </a:p>
+        </p:txBody>
+      </p:sp>
+      <p:sp>
+        <p:nvSpPr>
+          <p:cNvPr id="3" name="Title 2"/>
+          <p:cNvSpPr>
+            <a:spLocks noGrp="1"/>
+          </p:cNvSpPr>
+          <p:nvPr>
+            <p:ph type="title" idx="101"/>
           </p:nvPr>
         </p:nvSpPr>
         <p:spPr/>
@@ -6056,7 +6127,7 @@
           <a:lstStyle/>
           <a:p>
             <a:r>
-              <a:t>5. 교재 4.5 실제 엔진</a:t>
+              <a:t>교재 4.5 실제 엔진</a:t>
             </a:r>
           </a:p>
         </p:txBody>
@@ -6076,82 +6147,40 @@
           <a:bodyPr/>
           <a:lstStyle/>
           <a:p>
-            <a:pPr/>
-            <a:r>
-              <a:t>축약 계층 사전 구축 — 질의당 확정 노드가 수백 개 수준</a:t>
-            </a:r>
-          </a:p>
-          <a:p>
-            <a:pPr/>
-            <a:r>
-              <a:t>행렬 질의 — 승객 20명과 차량 30대를 600회가 아니라 20회 탐색으로 처리</a:t>
-            </a:r>
-          </a:p>
-          <a:p>
-            <a:pPr lvl="1"/>
-            <a:r>
-              <a:t>출발지 하나에서 모든 도착지까지 한 번에 계산하는 PHAST 방식</a:t>
-            </a:r>
-          </a:p>
-          <a:p>
-            <a:pPr/>
-            <a:r>
-              <a:t>속도 배열만 교체 — 시간대 전환 시 그래프 재생성 없이 계층 갱신</a:t>
-            </a:r>
-          </a:p>
-          <a:p>
-            <a:pPr lvl="1"/>
-            <a:r>
-              <a:t>처음부터 재구축하는 것보다 다섯 배 빠름</a:t>
-            </a:r>
-          </a:p>
-        </p:txBody>
-      </p:sp>
-      <p:sp>
-        <p:nvSpPr>
-          <p:cNvPr id="25" name="Slide Number Placeholder 0"/>
-          <p:cNvSpPr>
-            <a:spLocks noGrp="1"/>
-          </p:cNvSpPr>
-          <p:nvPr>
-            <p:ph type="sldNum" sz="quarter" idx="4294967295"/>
-          </p:nvPr>
-        </p:nvSpPr>
-        <p:spPr>
-          <a:xfrm>
-            <a:off x="10591495" y="6355080"/>
-            <a:ext cx="914400" cy="274320"/>
-          </a:xfrm>
-          <a:prstGeom prst="rect">
-            <a:avLst/>
-          </a:prstGeom>
-          <a:extLst>
-            <a:ext uri="{C572A759-6A51-4108-AA02-DFA0A04FC94B}">
-              <ma14:wrappingTextBoxFlag xmlns:ma14="http://schemas.microsoft.com/office/mac/drawingml/2011/main" val="0"/>
-            </a:ext>
-          </a:extLst>
-        </p:spPr>
-        <p:txBody>
-          <a:bodyPr/>
-          <a:lstStyle>
-            <a:lvl1pPr>
-              <a:defRPr sz="1000">
+            <a:pPr>
+              <a:spcAft>
+                <a:spcPts val="1000"/>
+              </a:spcAft>
+            </a:pPr>
+            <a:r>
+              <a:rPr>
                 <a:solidFill>
                   <a:srgbClr val="AFAFAF"/>
                 </a:solidFill>
-                <a:latin typeface="Pretendard Medium"/>
-                <a:ea typeface="Pretendard Medium"/>
-                <a:cs typeface="Pretendard Medium"/>
-              </a:defRPr>
-            </a:lvl1pPr>
-          </a:lstStyle>
-          <a:p>
-            <a:pPr algn="r"/>
-            <a:fld id="{F7021451-1387-4CA6-816F-3879F97B5CBC}" type="slidenum">
-              <a:rPr b="0" lang="en-US"/>
-              <a:t>1004</a:t>
-            </a:fld>
-            <a:endParaRPr lang="en-US"/>
+              </a:rPr>
+              <a:t>5.1  </a:t>
+            </a:r>
+            <a:r>
+              <a:t>엔진이 다르게 하는 세 가지</a:t>
+            </a:r>
+          </a:p>
+          <a:p>
+            <a:pPr>
+              <a:spcAft>
+                <a:spcPts val="1000"/>
+              </a:spcAft>
+            </a:pPr>
+            <a:r>
+              <a:rPr>
+                <a:solidFill>
+                  <a:srgbClr val="AFAFAF"/>
+                </a:solidFill>
+              </a:rPr>
+              <a:t>5.2  </a:t>
+            </a:r>
+            <a:r>
+              <a:t>우리 구현과의 대조</a:t>
+            </a:r>
           </a:p>
         </p:txBody>
       </p:sp>
@@ -6189,7 +6218,7 @@
           <a:lstStyle/>
           <a:p>
             <a:r>
-              <a:t>5.2 우리 구현과의 대조</a:t>
+              <a:t>5.1 엔진이 다르게 하는 세 가지</a:t>
             </a:r>
           </a:p>
         </p:txBody>
@@ -6232,25 +6261,31 @@
           <a:p>
             <a:pPr/>
             <a:r>
-              <a:t>서버가 있으면 우리 다익스트라와 엔진 결과를 나란히 비교</a:t>
+              <a:t>축약 계층 사전 구축 — 질의당 확정 노드가 수백 개 수준</a:t>
             </a:r>
           </a:p>
           <a:p>
             <a:pPr/>
             <a:r>
-              <a:t>완전히 일치하지는 않음</a:t>
+              <a:t>행렬 질의 — 승객 20명과 차량 30대를 600회가 아니라 20회 탐색으로 처리</a:t>
+            </a:r>
+          </a:p>
+          <a:p>
+            <a:pPr lvl="1"/>
+            <a:r>
+              <a:t>출발지 하나에서 모든 도착지까지 한 번에 계산하는 PHAST 방식</a:t>
             </a:r>
           </a:p>
           <a:p>
             <a:pPr/>
             <a:r>
-              <a:t>차이의 원인: 엔진은 승하차 시간과 회전 제한을 추가 반영</a:t>
-            </a:r>
-          </a:p>
-          <a:p>
-            <a:pPr/>
-            <a:r>
-              <a:t>값이 크게 벌어지면 대부분 스냅된 노드가 서로 다른 경우</a:t>
+              <a:t>속도 배열만 교체 — 시간대 전환 시 그래프 재생성 없이 계층 갱신</a:t>
+            </a:r>
+          </a:p>
+          <a:p>
+            <a:pPr lvl="1"/>
+            <a:r>
+              <a:t>처음부터 재구축하는 것보다 다섯 배 빠름</a:t>
             </a:r>
           </a:p>
         </p:txBody>
@@ -6323,12 +6358,12 @@
       <p:grpSpPr/>
       <p:sp>
         <p:nvSpPr>
-          <p:cNvPr id="2" name="Text Placeholder 1"/>
-          <p:cNvSpPr>
-            <a:spLocks noGrp="1"/>
-          </p:cNvSpPr>
-          <p:nvPr>
-            <p:ph type="body" idx="100"/>
+          <p:cNvPr id="2" name="Title 1"/>
+          <p:cNvSpPr>
+            <a:spLocks noGrp="1"/>
+          </p:cNvSpPr>
+          <p:nvPr>
+            <p:ph type="title" idx="100"/>
           </p:nvPr>
         </p:nvSpPr>
         <p:spPr/>
@@ -6337,19 +6372,19 @@
           <a:lstStyle/>
           <a:p>
             <a:r>
-              <a:t>06</a:t>
-            </a:r>
-          </a:p>
-        </p:txBody>
-      </p:sp>
-      <p:sp>
-        <p:nvSpPr>
-          <p:cNvPr id="3" name="Title 2"/>
-          <p:cNvSpPr>
-            <a:spLocks noGrp="1"/>
-          </p:cNvSpPr>
-          <p:nvPr>
-            <p:ph type="title" idx="101"/>
+              <a:t>5.2 우리 구현과의 대조</a:t>
+            </a:r>
+          </a:p>
+        </p:txBody>
+      </p:sp>
+      <p:sp>
+        <p:nvSpPr>
+          <p:cNvPr id="3" name="Text Placeholder 2"/>
+          <p:cNvSpPr>
+            <a:spLocks noGrp="1"/>
+          </p:cNvSpPr>
+          <p:nvPr>
+            <p:ph type="body" idx="101"/>
           </p:nvPr>
         </p:nvSpPr>
         <p:spPr/>
@@ -6358,7 +6393,7 @@
           <a:lstStyle/>
           <a:p>
             <a:r>
-              <a:t>교재 4.6 실습과 정리</a:t>
+              <a:t>5. 교재 4.5 실제 엔진</a:t>
             </a:r>
           </a:p>
         </p:txBody>
@@ -6378,40 +6413,76 @@
           <a:bodyPr/>
           <a:lstStyle/>
           <a:p>
-            <a:pPr>
-              <a:spcAft>
-                <a:spcPts val="1000"/>
-              </a:spcAft>
-            </a:pPr>
-            <a:r>
-              <a:rPr>
+            <a:pPr/>
+            <a:r>
+              <a:t>서버가 있으면 우리 다익스트라와 엔진 결과를 나란히 비교</a:t>
+            </a:r>
+          </a:p>
+          <a:p>
+            <a:pPr/>
+            <a:r>
+              <a:t>완전히 일치하지는 않음</a:t>
+            </a:r>
+          </a:p>
+          <a:p>
+            <a:pPr/>
+            <a:r>
+              <a:t>차이의 원인: 엔진은 승하차 시간과 회전 제한을 추가 반영</a:t>
+            </a:r>
+          </a:p>
+          <a:p>
+            <a:pPr/>
+            <a:r>
+              <a:t>값이 크게 벌어지면 대부분 스냅된 노드가 서로 다른 경우</a:t>
+            </a:r>
+          </a:p>
+        </p:txBody>
+      </p:sp>
+      <p:sp>
+        <p:nvSpPr>
+          <p:cNvPr id="25" name="Slide Number Placeholder 0"/>
+          <p:cNvSpPr>
+            <a:spLocks noGrp="1"/>
+          </p:cNvSpPr>
+          <p:nvPr>
+            <p:ph type="sldNum" sz="quarter" idx="4294967295"/>
+          </p:nvPr>
+        </p:nvSpPr>
+        <p:spPr>
+          <a:xfrm>
+            <a:off x="10591495" y="6355080"/>
+            <a:ext cx="914400" cy="274320"/>
+          </a:xfrm>
+          <a:prstGeom prst="rect">
+            <a:avLst/>
+          </a:prstGeom>
+          <a:extLst>
+            <a:ext uri="{C572A759-6A51-4108-AA02-DFA0A04FC94B}">
+              <ma14:wrappingTextBoxFlag xmlns:ma14="http://schemas.microsoft.com/office/mac/drawingml/2011/main" val="0"/>
+            </a:ext>
+          </a:extLst>
+        </p:spPr>
+        <p:txBody>
+          <a:bodyPr/>
+          <a:lstStyle>
+            <a:lvl1pPr>
+              <a:defRPr sz="1000">
                 <a:solidFill>
                   <a:srgbClr val="AFAFAF"/>
                 </a:solidFill>
-              </a:rPr>
-              <a:t>6.1  </a:t>
-            </a:r>
-            <a:r>
-              <a:t>오늘의 정리</a:t>
-            </a:r>
-          </a:p>
-          <a:p>
-            <a:pPr>
-              <a:spcAft>
-                <a:spcPts val="1000"/>
-              </a:spcAft>
-            </a:pPr>
-            <a:r>
-              <a:rPr>
-                <a:solidFill>
-                  <a:srgbClr val="AFAFAF"/>
-                </a:solidFill>
-              </a:rPr>
-              <a:t>6.2  </a:t>
-            </a:r>
-            <a:r>
-              <a:t>연습과 다음 장</a:t>
-            </a:r>
+                <a:latin typeface="Pretendard Medium"/>
+                <a:ea typeface="Pretendard Medium"/>
+                <a:cs typeface="Pretendard Medium"/>
+              </a:defRPr>
+            </a:lvl1pPr>
+          </a:lstStyle>
+          <a:p>
+            <a:pPr algn="r"/>
+            <a:fld id="{F7021451-1387-4CA6-816F-3879F97B5CBC}" type="slidenum">
+              <a:rPr b="0" lang="en-US"/>
+              <a:t>1004</a:t>
+            </a:fld>
+            <a:endParaRPr lang="en-US"/>
           </a:p>
         </p:txBody>
       </p:sp>
@@ -6435,12 +6506,12 @@
       <p:grpSpPr/>
       <p:sp>
         <p:nvSpPr>
-          <p:cNvPr id="2" name="Title 1"/>
-          <p:cNvSpPr>
-            <a:spLocks noGrp="1"/>
-          </p:cNvSpPr>
-          <p:nvPr>
-            <p:ph type="title" idx="100"/>
+          <p:cNvPr id="2" name="Text Placeholder 1"/>
+          <p:cNvSpPr>
+            <a:spLocks noGrp="1"/>
+          </p:cNvSpPr>
+          <p:nvPr>
+            <p:ph type="body" idx="100"/>
           </p:nvPr>
         </p:nvSpPr>
         <p:spPr/>
@@ -6449,19 +6520,19 @@
           <a:lstStyle/>
           <a:p>
             <a:r>
-              <a:t>6.1 오늘의 정리</a:t>
-            </a:r>
-          </a:p>
-        </p:txBody>
-      </p:sp>
-      <p:sp>
-        <p:nvSpPr>
-          <p:cNvPr id="3" name="Text Placeholder 2"/>
-          <p:cNvSpPr>
-            <a:spLocks noGrp="1"/>
-          </p:cNvSpPr>
-          <p:nvPr>
-            <p:ph type="body" idx="101"/>
+              <a:t>06</a:t>
+            </a:r>
+          </a:p>
+        </p:txBody>
+      </p:sp>
+      <p:sp>
+        <p:nvSpPr>
+          <p:cNvPr id="3" name="Title 2"/>
+          <p:cNvSpPr>
+            <a:spLocks noGrp="1"/>
+          </p:cNvSpPr>
+          <p:nvPr>
+            <p:ph type="title" idx="101"/>
           </p:nvPr>
         </p:nvSpPr>
         <p:spPr/>
@@ -6470,7 +6541,7 @@
           <a:lstStyle/>
           <a:p>
             <a:r>
-              <a:t>6. 교재 4.6 실습과 정리</a:t>
+              <a:t>교재 4.6 실습과 정리</a:t>
             </a:r>
           </a:p>
         </p:txBody>
@@ -6490,82 +6561,40 @@
           <a:bodyPr/>
           <a:lstStyle/>
           <a:p>
-            <a:pPr/>
-            <a:r>
-              <a:t>실측 속도 적용 시 하남시청에서 미사역까지 62% 증가</a:t>
-            </a:r>
-          </a:p>
-          <a:p>
-            <a:pPr lvl="1"/>
-            <a:r>
-              <a:t>자유류 5분 34초 · 오후 첨두 8분 59초</a:t>
-            </a:r>
-          </a:p>
-          <a:p>
-            <a:pPr/>
-            <a:r>
-              <a:t>소요시간뿐 아니라 경로 자체가 변경 — 무작위 쌍의 절반 가까이</a:t>
-            </a:r>
-          </a:p>
-          <a:p>
-            <a:pPr/>
-            <a:r>
-              <a:t>관측 결측 21.7%는 자유류로 대체, 대부분 이면도로</a:t>
-            </a:r>
-          </a:p>
-          <a:p>
-            <a:pPr/>
-            <a:r>
-              <a:t>시뮬레이션 1회에 3만 회 이상 질의 — 엔진이 필요한 이유</a:t>
-            </a:r>
-          </a:p>
-        </p:txBody>
-      </p:sp>
-      <p:sp>
-        <p:nvSpPr>
-          <p:cNvPr id="25" name="Slide Number Placeholder 0"/>
-          <p:cNvSpPr>
-            <a:spLocks noGrp="1"/>
-          </p:cNvSpPr>
-          <p:nvPr>
-            <p:ph type="sldNum" sz="quarter" idx="4294967295"/>
-          </p:nvPr>
-        </p:nvSpPr>
-        <p:spPr>
-          <a:xfrm>
-            <a:off x="10591495" y="6355080"/>
-            <a:ext cx="914400" cy="274320"/>
-          </a:xfrm>
-          <a:prstGeom prst="rect">
-            <a:avLst/>
-          </a:prstGeom>
-          <a:extLst>
-            <a:ext uri="{C572A759-6A51-4108-AA02-DFA0A04FC94B}">
-              <ma14:wrappingTextBoxFlag xmlns:ma14="http://schemas.microsoft.com/office/mac/drawingml/2011/main" val="0"/>
-            </a:ext>
-          </a:extLst>
-        </p:spPr>
-        <p:txBody>
-          <a:bodyPr/>
-          <a:lstStyle>
-            <a:lvl1pPr>
-              <a:defRPr sz="1000">
+            <a:pPr>
+              <a:spcAft>
+                <a:spcPts val="1000"/>
+              </a:spcAft>
+            </a:pPr>
+            <a:r>
+              <a:rPr>
                 <a:solidFill>
                   <a:srgbClr val="AFAFAF"/>
                 </a:solidFill>
-                <a:latin typeface="Pretendard Medium"/>
-                <a:ea typeface="Pretendard Medium"/>
-                <a:cs typeface="Pretendard Medium"/>
-              </a:defRPr>
-            </a:lvl1pPr>
-          </a:lstStyle>
-          <a:p>
-            <a:pPr algn="r"/>
-            <a:fld id="{F7021451-1387-4CA6-816F-3879F97B5CBC}" type="slidenum">
-              <a:rPr b="0" lang="en-US"/>
-              <a:t>1004</a:t>
-            </a:fld>
-            <a:endParaRPr lang="en-US"/>
+              </a:rPr>
+              <a:t>6.1  </a:t>
+            </a:r>
+            <a:r>
+              <a:t>오늘의 정리</a:t>
+            </a:r>
+          </a:p>
+          <a:p>
+            <a:pPr>
+              <a:spcAft>
+                <a:spcPts val="1000"/>
+              </a:spcAft>
+            </a:pPr>
+            <a:r>
+              <a:rPr>
+                <a:solidFill>
+                  <a:srgbClr val="AFAFAF"/>
+                </a:solidFill>
+              </a:rPr>
+              <a:t>6.2  </a:t>
+            </a:r>
+            <a:r>
+              <a:t>연습과 다음 장</a:t>
+            </a:r>
           </a:p>
         </p:txBody>
       </p:sp>
@@ -6603,7 +6632,7 @@
           <a:lstStyle/>
           <a:p>
             <a:r>
-              <a:t>6.2 연습과 다음 장</a:t>
+              <a:t>6.1 오늘의 정리</a:t>
             </a:r>
           </a:p>
         </p:txBody>
@@ -6646,37 +6675,31 @@
           <a:p>
             <a:pPr/>
             <a:r>
-              <a:t>연습 4.1 ★ — 도로 종류별 자유류와 오후 첨두 속도 차이</a:t>
+              <a:t>실측 속도 적용 시 하남시청에서 미사역까지 62% 증가</a:t>
             </a:r>
           </a:p>
           <a:p>
             <a:pPr lvl="1"/>
             <a:r>
-              <a:t>산출물: 종류별 비교표(자유류, 오후 첨두, 감소율) 상위 6행</a:t>
+              <a:t>자유류 5분 34초 · 오후 첨두 8분 59초</a:t>
             </a:r>
           </a:p>
           <a:p>
             <a:pPr/>
             <a:r>
-              <a:t>연습 4.2 ★★ — 결측을 같은 도로 종류의 관측 중앙값으로 대체</a:t>
-            </a:r>
-          </a:p>
-          <a:p>
-            <a:pPr lvl="1"/>
-            <a:r>
-              <a:t>산출물: 두 방식의 소요시간, 선택과 근거 3~4줄</a:t>
+              <a:t>소요시간뿐 아니라 경로 자체가 변경 — 무작위 쌍의 절반 가까이</a:t>
             </a:r>
           </a:p>
           <a:p>
             <a:pPr/>
             <a:r>
-              <a:t>연습 4.3 ★★★ — 시간의존 최단경로 구현</a:t>
+              <a:t>관측 결측 21.7%는 자유류로 대체, 대부분 이면도로</a:t>
             </a:r>
           </a:p>
           <a:p>
             <a:pPr/>
             <a:r>
-              <a:t>다음 장: 5장 GTFS 대중교통 시간표</a:t>
+              <a:t>시뮬레이션 1회에 3만 회 이상 질의 — 엔진이 필요한 이유</a:t>
             </a:r>
           </a:p>
         </p:txBody>
@@ -6897,7 +6920,7 @@
                           </a:solidFill>
                           <a:latin typeface="Pretendard Medium"/>
                         </a:rPr>
-                        <a:t>1.1 오전 8시의 같은 구간  ·  1.2 학습 목표</a:t>
+                        <a:t>1.1 오전 8시의 같은 구간  ·  1.2 학습 목표  ·  1.3 교재와 실습을 여는 곳</a:t>
                       </a:r>
                     </a:p>
                   </a:txBody>
@@ -7558,6 +7581,166 @@
           <a:lstStyle/>
           <a:p>
             <a:r>
+              <a:t>6.2 연습과 다음 장</a:t>
+            </a:r>
+          </a:p>
+        </p:txBody>
+      </p:sp>
+      <p:sp>
+        <p:nvSpPr>
+          <p:cNvPr id="3" name="Text Placeholder 2"/>
+          <p:cNvSpPr>
+            <a:spLocks noGrp="1"/>
+          </p:cNvSpPr>
+          <p:nvPr>
+            <p:ph type="body" idx="101"/>
+          </p:nvPr>
+        </p:nvSpPr>
+        <p:spPr/>
+        <p:txBody>
+          <a:bodyPr/>
+          <a:lstStyle/>
+          <a:p>
+            <a:r>
+              <a:t>6. 교재 4.6 실습과 정리</a:t>
+            </a:r>
+          </a:p>
+        </p:txBody>
+      </p:sp>
+      <p:sp>
+        <p:nvSpPr>
+          <p:cNvPr id="4" name="Text Placeholder 3"/>
+          <p:cNvSpPr>
+            <a:spLocks noGrp="1"/>
+          </p:cNvSpPr>
+          <p:nvPr>
+            <p:ph type="body" idx="102"/>
+          </p:nvPr>
+        </p:nvSpPr>
+        <p:spPr/>
+        <p:txBody>
+          <a:bodyPr/>
+          <a:lstStyle/>
+          <a:p>
+            <a:pPr/>
+            <a:r>
+              <a:t>연습 4.1 ★ — 도로 종류별 자유류와 오후 첨두 속도 차이</a:t>
+            </a:r>
+          </a:p>
+          <a:p>
+            <a:pPr lvl="1"/>
+            <a:r>
+              <a:t>산출물: 종류별 비교표(자유류, 오후 첨두, 감소율) 상위 6행</a:t>
+            </a:r>
+          </a:p>
+          <a:p>
+            <a:pPr/>
+            <a:r>
+              <a:t>연습 4.2 ★★ — 결측을 같은 도로 종류의 관측 중앙값으로 대체</a:t>
+            </a:r>
+          </a:p>
+          <a:p>
+            <a:pPr lvl="1"/>
+            <a:r>
+              <a:t>산출물: 두 방식의 소요시간, 선택과 근거 3~4줄</a:t>
+            </a:r>
+          </a:p>
+          <a:p>
+            <a:pPr/>
+            <a:r>
+              <a:t>연습 4.3 ★★★ — 시간의존 최단경로 구현</a:t>
+            </a:r>
+          </a:p>
+          <a:p>
+            <a:pPr/>
+            <a:r>
+              <a:t>다음 장: 5장 GTFS 대중교통 시간표</a:t>
+            </a:r>
+          </a:p>
+        </p:txBody>
+      </p:sp>
+      <p:sp>
+        <p:nvSpPr>
+          <p:cNvPr id="25" name="Slide Number Placeholder 0"/>
+          <p:cNvSpPr>
+            <a:spLocks noGrp="1"/>
+          </p:cNvSpPr>
+          <p:nvPr>
+            <p:ph type="sldNum" sz="quarter" idx="4294967295"/>
+          </p:nvPr>
+        </p:nvSpPr>
+        <p:spPr>
+          <a:xfrm>
+            <a:off x="10591495" y="6355080"/>
+            <a:ext cx="914400" cy="274320"/>
+          </a:xfrm>
+          <a:prstGeom prst="rect">
+            <a:avLst/>
+          </a:prstGeom>
+          <a:extLst>
+            <a:ext uri="{C572A759-6A51-4108-AA02-DFA0A04FC94B}">
+              <ma14:wrappingTextBoxFlag xmlns:ma14="http://schemas.microsoft.com/office/mac/drawingml/2011/main" val="0"/>
+            </a:ext>
+          </a:extLst>
+        </p:spPr>
+        <p:txBody>
+          <a:bodyPr/>
+          <a:lstStyle>
+            <a:lvl1pPr>
+              <a:defRPr sz="1000">
+                <a:solidFill>
+                  <a:srgbClr val="AFAFAF"/>
+                </a:solidFill>
+                <a:latin typeface="Pretendard Medium"/>
+                <a:ea typeface="Pretendard Medium"/>
+                <a:cs typeface="Pretendard Medium"/>
+              </a:defRPr>
+            </a:lvl1pPr>
+          </a:lstStyle>
+          <a:p>
+            <a:pPr algn="r"/>
+            <a:fld id="{F7021451-1387-4CA6-816F-3879F97B5CBC}" type="slidenum">
+              <a:rPr b="0" lang="en-US"/>
+              <a:t>1004</a:t>
+            </a:fld>
+            <a:endParaRPr lang="en-US"/>
+          </a:p>
+        </p:txBody>
+      </p:sp>
+    </p:spTree>
+  </p:cSld>
+  <p:clrMapOvr>
+    <a:masterClrMapping/>
+  </p:clrMapOvr>
+</p:sld>
+</file>
+
+<file path=ppt/slides/slide21.xml><?xml version="1.0" encoding="utf-8"?>
+<p:sld xmlns:a="http://schemas.openxmlformats.org/drawingml/2006/main" xmlns:p="http://schemas.openxmlformats.org/presentationml/2006/main" xmlns:r="http://schemas.openxmlformats.org/officeDocument/2006/relationships">
+  <p:cSld>
+    <p:spTree>
+      <p:nvGrpSpPr>
+        <p:cNvPr id="1" name=""/>
+        <p:cNvGrpSpPr/>
+        <p:nvPr/>
+      </p:nvGrpSpPr>
+      <p:grpSpPr/>
+      <p:sp>
+        <p:nvSpPr>
+          <p:cNvPr id="2" name="Title 1"/>
+          <p:cNvSpPr>
+            <a:spLocks noGrp="1"/>
+          </p:cNvSpPr>
+          <p:nvPr>
+            <p:ph type="title" idx="100"/>
+          </p:nvPr>
+        </p:nvSpPr>
+        <p:spPr/>
+        <p:txBody>
+          <a:bodyPr/>
+          <a:lstStyle/>
+          <a:p>
+            <a:r>
               <a:t>수요일에 봅니다</a:t>
             </a:r>
           </a:p>
@@ -7715,6 +7898,24 @@
               <a:t>학습 목표</a:t>
             </a:r>
           </a:p>
+          <a:p>
+            <a:pPr>
+              <a:spcAft>
+                <a:spcPts val="1000"/>
+              </a:spcAft>
+            </a:pPr>
+            <a:r>
+              <a:rPr>
+                <a:solidFill>
+                  <a:srgbClr val="AFAFAF"/>
+                </a:solidFill>
+              </a:rPr>
+              <a:t>1.3  </a:t>
+            </a:r>
+            <a:r>
+              <a:t>교재와 실습을 여는 곳</a:t>
+            </a:r>
+          </a:p>
         </p:txBody>
       </p:sp>
     </p:spTree>
@@ -8033,12 +8234,12 @@
       <p:grpSpPr/>
       <p:sp>
         <p:nvSpPr>
-          <p:cNvPr id="2" name="Text Placeholder 1"/>
-          <p:cNvSpPr>
-            <a:spLocks noGrp="1"/>
-          </p:cNvSpPr>
-          <p:nvPr>
-            <p:ph type="body" idx="100"/>
+          <p:cNvPr id="2" name="Title 1"/>
+          <p:cNvSpPr>
+            <a:spLocks noGrp="1"/>
+          </p:cNvSpPr>
+          <p:nvPr>
+            <p:ph type="title" idx="100"/>
           </p:nvPr>
         </p:nvSpPr>
         <p:spPr/>
@@ -8047,19 +8248,19 @@
           <a:lstStyle/>
           <a:p>
             <a:r>
-              <a:t>02</a:t>
-            </a:r>
-          </a:p>
-        </p:txBody>
-      </p:sp>
-      <p:sp>
-        <p:nvSpPr>
-          <p:cNvPr id="3" name="Title 2"/>
-          <p:cNvSpPr>
-            <a:spLocks noGrp="1"/>
-          </p:cNvSpPr>
-          <p:nvPr>
-            <p:ph type="title" idx="101"/>
+              <a:t>1.3 교재와 실습을 여는 곳</a:t>
+            </a:r>
+          </a:p>
+        </p:txBody>
+      </p:sp>
+      <p:sp>
+        <p:nvSpPr>
+          <p:cNvPr id="3" name="Text Placeholder 2"/>
+          <p:cNvSpPr>
+            <a:spLocks noGrp="1"/>
+          </p:cNvSpPr>
+          <p:nvPr>
+            <p:ph type="body" idx="101"/>
           </p:nvPr>
         </p:nvSpPr>
         <p:spPr/>
@@ -8068,7 +8269,7 @@
           <a:lstStyle/>
           <a:p>
             <a:r>
-              <a:t>교재 4.1 시간대별 속도 컬럼</a:t>
+              <a:t>1. 도입과 학습 목표</a:t>
             </a:r>
           </a:p>
         </p:txBody>
@@ -8088,40 +8289,335 @@
           <a:bodyPr/>
           <a:lstStyle/>
           <a:p>
-            <a:pPr>
-              <a:spcAft>
-                <a:spcPts val="1000"/>
-              </a:spcAft>
-            </a:pPr>
-            <a:r>
-              <a:rPr>
+            <a:pPr/>
+            <a:r>
+              <a:t>저장소: github.com/jihoyeo/mobility-simulation-book — blob/main 아래 경로</a:t>
+            </a:r>
+          </a:p>
+          <a:p>
+            <a:pPr/>
+            <a:r>
+              <a:t>노트북 실행: jupyter lab labs/ch04_speeds_engine.ipynb</a:t>
+            </a:r>
+          </a:p>
+          <a:p>
+            <a:pPr/>
+            <a:r>
+              <a:t>진행 순서: 슬라이드 개요 → 교재 본문 → 실습 노트북</a:t>
+            </a:r>
+          </a:p>
+        </p:txBody>
+      </p:sp>
+      <p:sp>
+        <p:nvSpPr>
+          <p:cNvPr id="5" name="Text Placeholder 4"/>
+          <p:cNvSpPr>
+            <a:spLocks noGrp="1"/>
+          </p:cNvSpPr>
+          <p:nvPr>
+            <p:ph type="body" idx="103"/>
+          </p:nvPr>
+        </p:nvSpPr>
+        <p:spPr/>
+        <p:txBody>
+          <a:bodyPr/>
+          <a:lstStyle/>
+          <a:p>
+            <a:r>
+              <a:t>표 1. 오늘 여는 파일과 경로</a:t>
+            </a:r>
+          </a:p>
+        </p:txBody>
+      </p:sp>
+      <p:graphicFrame>
+        <p:nvGraphicFramePr>
+          <p:cNvPr id="6" name="Table Placeholder 5"/>
+          <p:cNvGraphicFramePr>
+            <a:graphicFrameLocks noGrp="1"/>
+          </p:cNvGraphicFramePr>
+          <p:nvPr>
+            <p:ph type="tbl" idx="104"/>
+          </p:nvPr>
+        </p:nvGraphicFramePr>
+        <p:xfrm>
+          <a:off x="4937760" y="1828800"/>
+          <a:ext cx="6565392" cy="1676400"/>
+        </p:xfrm>
+        <a:graphic>
+          <a:graphicData uri="http://schemas.openxmlformats.org/drawingml/2006/table">
+            <a:tbl>
+              <a:tblPr firstRow="0" bandRow="0" firstCol="0" lastRow="0" lastCol="0" bandCol="0"/>
+              <a:tblGrid>
+                <a:gridCol w="3282696"/>
+                <a:gridCol w="3282696"/>
+              </a:tblGrid>
+              <a:tr h="406400">
+                <a:tc>
+                  <a:txBody>
+                    <a:bodyPr/>
+                    <a:lstStyle/>
+                    <a:p>
+                      <a:r>
+                        <a:rPr sz="1300" b="0">
+                          <a:solidFill>
+                            <a:srgbClr val="FFFFFF"/>
+                          </a:solidFill>
+                          <a:latin typeface="Pretendard Medium"/>
+                        </a:rPr>
+                        <a:t>자료</a:t>
+                      </a:r>
+                    </a:p>
+                  </a:txBody>
+                  <a:tcPr marL="101600" marR="101600" marT="76200" marB="76200" anchor="ctr">
+                    <a:solidFill>
+                      <a:srgbClr val="000000"/>
+                    </a:solidFill>
+                    <a:lnL w="0">
+                      <a:noFill/>
+                    </a:lnL>
+                    <a:lnR w="0">
+                      <a:noFill/>
+                    </a:lnR>
+                    <a:lnT w="0">
+                      <a:noFill/>
+                    </a:lnT>
+                    <a:lnB w="0">
+                      <a:noFill/>
+                    </a:lnB>
+                  </a:tcPr>
+                </a:tc>
+                <a:tc>
+                  <a:txBody>
+                    <a:bodyPr/>
+                    <a:lstStyle/>
+                    <a:p>
+                      <a:r>
+                        <a:rPr sz="1300" b="0">
+                          <a:solidFill>
+                            <a:srgbClr val="FFFFFF"/>
+                          </a:solidFill>
+                          <a:latin typeface="Pretendard Medium"/>
+                        </a:rPr>
+                        <a:t>경로</a:t>
+                      </a:r>
+                    </a:p>
+                  </a:txBody>
+                  <a:tcPr marL="101600" marR="101600" marT="76200" marB="76200" anchor="ctr">
+                    <a:solidFill>
+                      <a:srgbClr val="000000"/>
+                    </a:solidFill>
+                    <a:lnL w="0">
+                      <a:noFill/>
+                    </a:lnL>
+                    <a:lnR w="0">
+                      <a:noFill/>
+                    </a:lnR>
+                    <a:lnT w="0">
+                      <a:noFill/>
+                    </a:lnT>
+                    <a:lnB w="0">
+                      <a:noFill/>
+                    </a:lnB>
+                  </a:tcPr>
+                </a:tc>
+              </a:tr>
+              <a:tr h="635000">
+                <a:tc>
+                  <a:txBody>
+                    <a:bodyPr/>
+                    <a:lstStyle/>
+                    <a:p>
+                      <a:r>
+                        <a:rPr sz="1300" b="1">
+                          <a:solidFill>
+                            <a:srgbClr val="000000"/>
+                          </a:solidFill>
+                          <a:latin typeface="Pretendard"/>
+                        </a:rPr>
+                        <a:t>교재 원고</a:t>
+                      </a:r>
+                    </a:p>
+                  </a:txBody>
+                  <a:tcPr marL="101600" marR="101600" marT="101600" marB="101600" anchor="ctr">
+                    <a:solidFill>
+                      <a:srgbClr val="FFFFFF"/>
+                    </a:solidFill>
+                    <a:lnL w="0">
+                      <a:noFill/>
+                    </a:lnL>
+                    <a:lnR w="0">
+                      <a:noFill/>
+                    </a:lnR>
+                    <a:lnT w="0">
+                      <a:noFill/>
+                    </a:lnT>
+                    <a:lnB w="9525">
+                      <a:solidFill>
+                        <a:srgbClr val="E2E2E2"/>
+                      </a:solidFill>
+                    </a:lnB>
+                  </a:tcPr>
+                </a:tc>
+                <a:tc>
+                  <a:txBody>
+                    <a:bodyPr/>
+                    <a:lstStyle/>
+                    <a:p>
+                      <a:r>
+                        <a:rPr sz="1300" b="0">
+                          <a:solidFill>
+                            <a:srgbClr val="5E5E5E"/>
+                          </a:solidFill>
+                          <a:latin typeface="Pretendard Medium"/>
+                        </a:rPr>
+                        <a:t>ko/ch04_speeds_engine.md</a:t>
+                      </a:r>
+                    </a:p>
+                  </a:txBody>
+                  <a:tcPr marL="101600" marR="101600" marT="101600" marB="101600" anchor="ctr">
+                    <a:solidFill>
+                      <a:srgbClr val="FFFFFF"/>
+                    </a:solidFill>
+                    <a:lnL w="0">
+                      <a:noFill/>
+                    </a:lnL>
+                    <a:lnR w="0">
+                      <a:noFill/>
+                    </a:lnR>
+                    <a:lnT w="0">
+                      <a:noFill/>
+                    </a:lnT>
+                    <a:lnB w="9525">
+                      <a:solidFill>
+                        <a:srgbClr val="E2E2E2"/>
+                      </a:solidFill>
+                    </a:lnB>
+                  </a:tcPr>
+                </a:tc>
+              </a:tr>
+              <a:tr h="635000">
+                <a:tc>
+                  <a:txBody>
+                    <a:bodyPr/>
+                    <a:lstStyle/>
+                    <a:p>
+                      <a:r>
+                        <a:rPr sz="1300" b="1">
+                          <a:solidFill>
+                            <a:srgbClr val="000000"/>
+                          </a:solidFill>
+                          <a:latin typeface="Pretendard"/>
+                        </a:rPr>
+                        <a:t>실습 노트북</a:t>
+                      </a:r>
+                    </a:p>
+                  </a:txBody>
+                  <a:tcPr marL="101600" marR="101600" marT="101600" marB="101600" anchor="ctr">
+                    <a:solidFill>
+                      <a:srgbClr val="FFFFFF"/>
+                    </a:solidFill>
+                    <a:lnL w="0">
+                      <a:noFill/>
+                    </a:lnL>
+                    <a:lnR w="0">
+                      <a:noFill/>
+                    </a:lnR>
+                    <a:lnT w="0">
+                      <a:noFill/>
+                    </a:lnT>
+                    <a:lnB w="9525">
+                      <a:solidFill>
+                        <a:srgbClr val="E2E2E2"/>
+                      </a:solidFill>
+                    </a:lnB>
+                  </a:tcPr>
+                </a:tc>
+                <a:tc>
+                  <a:txBody>
+                    <a:bodyPr/>
+                    <a:lstStyle/>
+                    <a:p>
+                      <a:r>
+                        <a:rPr sz="1300" b="0">
+                          <a:solidFill>
+                            <a:srgbClr val="5E5E5E"/>
+                          </a:solidFill>
+                          <a:latin typeface="Pretendard Medium"/>
+                        </a:rPr>
+                        <a:t>labs/ch04_speeds_engine.ipynb</a:t>
+                      </a:r>
+                    </a:p>
+                  </a:txBody>
+                  <a:tcPr marL="101600" marR="101600" marT="101600" marB="101600" anchor="ctr">
+                    <a:solidFill>
+                      <a:srgbClr val="FFFFFF"/>
+                    </a:solidFill>
+                    <a:lnL w="0">
+                      <a:noFill/>
+                    </a:lnL>
+                    <a:lnR w="0">
+                      <a:noFill/>
+                    </a:lnR>
+                    <a:lnT w="0">
+                      <a:noFill/>
+                    </a:lnT>
+                    <a:lnB w="9525">
+                      <a:solidFill>
+                        <a:srgbClr val="E2E2E2"/>
+                      </a:solidFill>
+                    </a:lnB>
+                  </a:tcPr>
+                </a:tc>
+              </a:tr>
+            </a:tbl>
+          </a:graphicData>
+        </a:graphic>
+      </p:graphicFrame>
+      <p:sp>
+        <p:nvSpPr>
+          <p:cNvPr id="25" name="Slide Number Placeholder 0"/>
+          <p:cNvSpPr>
+            <a:spLocks noGrp="1"/>
+          </p:cNvSpPr>
+          <p:nvPr>
+            <p:ph type="sldNum" sz="quarter" idx="4294967295"/>
+          </p:nvPr>
+        </p:nvSpPr>
+        <p:spPr>
+          <a:xfrm>
+            <a:off x="10591495" y="6355080"/>
+            <a:ext cx="914400" cy="274320"/>
+          </a:xfrm>
+          <a:prstGeom prst="rect">
+            <a:avLst/>
+          </a:prstGeom>
+          <a:extLst>
+            <a:ext uri="{C572A759-6A51-4108-AA02-DFA0A04FC94B}">
+              <ma14:wrappingTextBoxFlag xmlns:ma14="http://schemas.microsoft.com/office/mac/drawingml/2011/main" val="0"/>
+            </a:ext>
+          </a:extLst>
+        </p:spPr>
+        <p:txBody>
+          <a:bodyPr/>
+          <a:lstStyle>
+            <a:lvl1pPr>
+              <a:defRPr sz="1000">
                 <a:solidFill>
                   <a:srgbClr val="AFAFAF"/>
                 </a:solidFill>
-              </a:rPr>
-              <a:t>2.1  </a:t>
-            </a:r>
-            <a:r>
-              <a:t>여덟 개의 시간대</a:t>
-            </a:r>
-          </a:p>
-          <a:p>
-            <a:pPr>
-              <a:spcAft>
-                <a:spcPts val="1000"/>
-              </a:spcAft>
-            </a:pPr>
-            <a:r>
-              <a:rPr>
-                <a:solidFill>
-                  <a:srgbClr val="AFAFAF"/>
-                </a:solidFill>
-              </a:rPr>
-              <a:t>2.2  </a:t>
-            </a:r>
-            <a:r>
-              <a:t>실측 속도와 결측 처리</a:t>
-            </a:r>
+                <a:latin typeface="Pretendard Medium"/>
+                <a:ea typeface="Pretendard Medium"/>
+                <a:cs typeface="Pretendard Medium"/>
+              </a:defRPr>
+            </a:lvl1pPr>
+          </a:lstStyle>
+          <a:p>
+            <a:pPr algn="r"/>
+            <a:fld id="{F7021451-1387-4CA6-816F-3879F97B5CBC}" type="slidenum">
+              <a:rPr b="0" lang="en-US"/>
+              <a:t>1008</a:t>
+            </a:fld>
+            <a:endParaRPr lang="en-US"/>
           </a:p>
         </p:txBody>
       </p:sp>
@@ -8145,12 +8641,12 @@
       <p:grpSpPr/>
       <p:sp>
         <p:nvSpPr>
-          <p:cNvPr id="2" name="Title 1"/>
-          <p:cNvSpPr>
-            <a:spLocks noGrp="1"/>
-          </p:cNvSpPr>
-          <p:nvPr>
-            <p:ph type="title" idx="100"/>
+          <p:cNvPr id="2" name="Text Placeholder 1"/>
+          <p:cNvSpPr>
+            <a:spLocks noGrp="1"/>
+          </p:cNvSpPr>
+          <p:nvPr>
+            <p:ph type="body" idx="100"/>
           </p:nvPr>
         </p:nvSpPr>
         <p:spPr/>
@@ -8159,19 +8655,19 @@
           <a:lstStyle/>
           <a:p>
             <a:r>
-              <a:t>2.1 여덟 개의 시간대</a:t>
-            </a:r>
-          </a:p>
-        </p:txBody>
-      </p:sp>
-      <p:sp>
-        <p:nvSpPr>
-          <p:cNvPr id="3" name="Text Placeholder 2"/>
-          <p:cNvSpPr>
-            <a:spLocks noGrp="1"/>
-          </p:cNvSpPr>
-          <p:nvPr>
-            <p:ph type="body" idx="101"/>
+              <a:t>02</a:t>
+            </a:r>
+          </a:p>
+        </p:txBody>
+      </p:sp>
+      <p:sp>
+        <p:nvSpPr>
+          <p:cNvPr id="3" name="Title 2"/>
+          <p:cNvSpPr>
+            <a:spLocks noGrp="1"/>
+          </p:cNvSpPr>
+          <p:nvPr>
+            <p:ph type="title" idx="101"/>
           </p:nvPr>
         </p:nvSpPr>
         <p:spPr/>
@@ -8180,7 +8676,7 @@
           <a:lstStyle/>
           <a:p>
             <a:r>
-              <a:t>2. 교재 4.1 시간대별 속도 컬럼</a:t>
+              <a:t>교재 4.1 시간대별 속도 컬럼</a:t>
             </a:r>
           </a:p>
         </p:txBody>
@@ -8200,82 +8696,40 @@
           <a:bodyPr/>
           <a:lstStyle/>
           <a:p>
-            <a:pPr/>
-            <a:r>
-              <a:t>weekday로 시작하는 여덟 개 컬럼이 주중 시간대별 관측 속도</a:t>
-            </a:r>
-          </a:p>
-          <a:p>
-            <a:pPr lvl="1"/>
-            <a:r>
-              <a:t>offpeak 06–07 · am_peak 07–09 · am_shoulder 09–10 · midday 10–12</a:t>
-            </a:r>
-          </a:p>
-          <a:p>
-            <a:pPr lvl="1"/>
-            <a:r>
-              <a:t>afternoon 12–17 · pm_peak 17–19 · pm_shoulder 19–22 · night 22–06</a:t>
-            </a:r>
-          </a:p>
-          <a:p>
-            <a:pPr/>
-            <a:r>
-              <a:t>컬럼 이름의 p50은 중앙값</a:t>
-            </a:r>
-          </a:p>
-          <a:p>
-            <a:pPr/>
-            <a:r>
-              <a:t>출처: 국가교통데이터베이스 계열의 속도 통계</a:t>
-            </a:r>
-          </a:p>
-        </p:txBody>
-      </p:sp>
-      <p:sp>
-        <p:nvSpPr>
-          <p:cNvPr id="25" name="Slide Number Placeholder 0"/>
-          <p:cNvSpPr>
-            <a:spLocks noGrp="1"/>
-          </p:cNvSpPr>
-          <p:nvPr>
-            <p:ph type="sldNum" sz="quarter" idx="4294967295"/>
-          </p:nvPr>
-        </p:nvSpPr>
-        <p:spPr>
-          <a:xfrm>
-            <a:off x="10591495" y="6355080"/>
-            <a:ext cx="914400" cy="274320"/>
-          </a:xfrm>
-          <a:prstGeom prst="rect">
-            <a:avLst/>
-          </a:prstGeom>
-          <a:extLst>
-            <a:ext uri="{C572A759-6A51-4108-AA02-DFA0A04FC94B}">
-              <ma14:wrappingTextBoxFlag xmlns:ma14="http://schemas.microsoft.com/office/mac/drawingml/2011/main" val="0"/>
-            </a:ext>
-          </a:extLst>
-        </p:spPr>
-        <p:txBody>
-          <a:bodyPr/>
-          <a:lstStyle>
-            <a:lvl1pPr>
-              <a:defRPr sz="1000">
+            <a:pPr>
+              <a:spcAft>
+                <a:spcPts val="1000"/>
+              </a:spcAft>
+            </a:pPr>
+            <a:r>
+              <a:rPr>
                 <a:solidFill>
                   <a:srgbClr val="AFAFAF"/>
                 </a:solidFill>
-                <a:latin typeface="Pretendard Medium"/>
-                <a:ea typeface="Pretendard Medium"/>
-                <a:cs typeface="Pretendard Medium"/>
-              </a:defRPr>
-            </a:lvl1pPr>
-          </a:lstStyle>
-          <a:p>
-            <a:pPr algn="r"/>
-            <a:fld id="{F7021451-1387-4CA6-816F-3879F97B5CBC}" type="slidenum">
-              <a:rPr b="0" lang="en-US"/>
-              <a:t>1004</a:t>
-            </a:fld>
-            <a:endParaRPr lang="en-US"/>
+              </a:rPr>
+              <a:t>2.1  </a:t>
+            </a:r>
+            <a:r>
+              <a:t>여덟 개의 시간대</a:t>
+            </a:r>
+          </a:p>
+          <a:p>
+            <a:pPr>
+              <a:spcAft>
+                <a:spcPts val="1000"/>
+              </a:spcAft>
+            </a:pPr>
+            <a:r>
+              <a:rPr>
+                <a:solidFill>
+                  <a:srgbClr val="AFAFAF"/>
+                </a:solidFill>
+              </a:rPr>
+              <a:t>2.2  </a:t>
+            </a:r>
+            <a:r>
+              <a:t>실측 속도와 결측 처리</a:t>
+            </a:r>
           </a:p>
         </p:txBody>
       </p:sp>
@@ -8313,6 +8767,160 @@
           <a:lstStyle/>
           <a:p>
             <a:r>
+              <a:t>2.1 여덟 개의 시간대</a:t>
+            </a:r>
+          </a:p>
+        </p:txBody>
+      </p:sp>
+      <p:sp>
+        <p:nvSpPr>
+          <p:cNvPr id="3" name="Text Placeholder 2"/>
+          <p:cNvSpPr>
+            <a:spLocks noGrp="1"/>
+          </p:cNvSpPr>
+          <p:nvPr>
+            <p:ph type="body" idx="101"/>
+          </p:nvPr>
+        </p:nvSpPr>
+        <p:spPr/>
+        <p:txBody>
+          <a:bodyPr/>
+          <a:lstStyle/>
+          <a:p>
+            <a:r>
+              <a:t>2. 교재 4.1 시간대별 속도 컬럼</a:t>
+            </a:r>
+          </a:p>
+        </p:txBody>
+      </p:sp>
+      <p:sp>
+        <p:nvSpPr>
+          <p:cNvPr id="4" name="Text Placeholder 3"/>
+          <p:cNvSpPr>
+            <a:spLocks noGrp="1"/>
+          </p:cNvSpPr>
+          <p:nvPr>
+            <p:ph type="body" idx="102"/>
+          </p:nvPr>
+        </p:nvSpPr>
+        <p:spPr/>
+        <p:txBody>
+          <a:bodyPr/>
+          <a:lstStyle/>
+          <a:p>
+            <a:pPr/>
+            <a:r>
+              <a:t>weekday로 시작하는 여덟 개 컬럼이 주중 시간대별 관측 속도</a:t>
+            </a:r>
+          </a:p>
+          <a:p>
+            <a:pPr lvl="1"/>
+            <a:r>
+              <a:t>offpeak 06–07 · am_peak 07–09 · am_shoulder 09–10 · midday 10–12</a:t>
+            </a:r>
+          </a:p>
+          <a:p>
+            <a:pPr lvl="1"/>
+            <a:r>
+              <a:t>afternoon 12–17 · pm_peak 17–19 · pm_shoulder 19–22 · night 22–06</a:t>
+            </a:r>
+          </a:p>
+          <a:p>
+            <a:pPr/>
+            <a:r>
+              <a:t>컬럼 이름의 p50은 중앙값</a:t>
+            </a:r>
+          </a:p>
+          <a:p>
+            <a:pPr/>
+            <a:r>
+              <a:t>출처: 국가교통데이터베이스 계열의 속도 통계</a:t>
+            </a:r>
+          </a:p>
+        </p:txBody>
+      </p:sp>
+      <p:sp>
+        <p:nvSpPr>
+          <p:cNvPr id="25" name="Slide Number Placeholder 0"/>
+          <p:cNvSpPr>
+            <a:spLocks noGrp="1"/>
+          </p:cNvSpPr>
+          <p:nvPr>
+            <p:ph type="sldNum" sz="quarter" idx="4294967295"/>
+          </p:nvPr>
+        </p:nvSpPr>
+        <p:spPr>
+          <a:xfrm>
+            <a:off x="10591495" y="6355080"/>
+            <a:ext cx="914400" cy="274320"/>
+          </a:xfrm>
+          <a:prstGeom prst="rect">
+            <a:avLst/>
+          </a:prstGeom>
+          <a:extLst>
+            <a:ext uri="{C572A759-6A51-4108-AA02-DFA0A04FC94B}">
+              <ma14:wrappingTextBoxFlag xmlns:ma14="http://schemas.microsoft.com/office/mac/drawingml/2011/main" val="0"/>
+            </a:ext>
+          </a:extLst>
+        </p:spPr>
+        <p:txBody>
+          <a:bodyPr/>
+          <a:lstStyle>
+            <a:lvl1pPr>
+              <a:defRPr sz="1000">
+                <a:solidFill>
+                  <a:srgbClr val="AFAFAF"/>
+                </a:solidFill>
+                <a:latin typeface="Pretendard Medium"/>
+                <a:ea typeface="Pretendard Medium"/>
+                <a:cs typeface="Pretendard Medium"/>
+              </a:defRPr>
+            </a:lvl1pPr>
+          </a:lstStyle>
+          <a:p>
+            <a:pPr algn="r"/>
+            <a:fld id="{F7021451-1387-4CA6-816F-3879F97B5CBC}" type="slidenum">
+              <a:rPr b="0" lang="en-US"/>
+              <a:t>1004</a:t>
+            </a:fld>
+            <a:endParaRPr lang="en-US"/>
+          </a:p>
+        </p:txBody>
+      </p:sp>
+    </p:spTree>
+  </p:cSld>
+  <p:clrMapOvr>
+    <a:masterClrMapping/>
+  </p:clrMapOvr>
+</p:sld>
+</file>
+
+<file path=ppt/slides/slide9.xml><?xml version="1.0" encoding="utf-8"?>
+<p:sld xmlns:a="http://schemas.openxmlformats.org/drawingml/2006/main" xmlns:p="http://schemas.openxmlformats.org/presentationml/2006/main" xmlns:r="http://schemas.openxmlformats.org/officeDocument/2006/relationships">
+  <p:cSld>
+    <p:spTree>
+      <p:nvGrpSpPr>
+        <p:cNvPr id="1" name=""/>
+        <p:cNvGrpSpPr/>
+        <p:nvPr/>
+      </p:nvGrpSpPr>
+      <p:grpSpPr/>
+      <p:sp>
+        <p:nvSpPr>
+          <p:cNvPr id="2" name="Title 1"/>
+          <p:cNvSpPr>
+            <a:spLocks noGrp="1"/>
+          </p:cNvSpPr>
+          <p:nvPr>
+            <p:ph type="title" idx="100"/>
+          </p:nvPr>
+        </p:nvSpPr>
+        <p:spPr/>
+        <p:txBody>
+          <a:bodyPr/>
+          <a:lstStyle/>
+          <a:p>
+            <a:r>
               <a:t>2.2 실측 속도와 결측 처리</a:t>
             </a:r>
           </a:p>
@@ -8389,7 +8997,7 @@
           <a:lstStyle/>
           <a:p>
             <a:r>
-              <a:t>표 1. 하남시 도로의 속도 통계</a:t>
+              <a:t>표 2. 하남시 도로의 속도 통계</a:t>
             </a:r>
           </a:p>
         </p:txBody>
@@ -8831,118 +9439,6 @@
               <a:t>1008</a:t>
             </a:fld>
             <a:endParaRPr lang="en-US"/>
-          </a:p>
-        </p:txBody>
-      </p:sp>
-    </p:spTree>
-  </p:cSld>
-  <p:clrMapOvr>
-    <a:masterClrMapping/>
-  </p:clrMapOvr>
-</p:sld>
-</file>
-
-<file path=ppt/slides/slide9.xml><?xml version="1.0" encoding="utf-8"?>
-<p:sld xmlns:a="http://schemas.openxmlformats.org/drawingml/2006/main" xmlns:p="http://schemas.openxmlformats.org/presentationml/2006/main" xmlns:r="http://schemas.openxmlformats.org/officeDocument/2006/relationships">
-  <p:cSld>
-    <p:spTree>
-      <p:nvGrpSpPr>
-        <p:cNvPr id="1" name=""/>
-        <p:cNvGrpSpPr/>
-        <p:nvPr/>
-      </p:nvGrpSpPr>
-      <p:grpSpPr/>
-      <p:sp>
-        <p:nvSpPr>
-          <p:cNvPr id="2" name="Text Placeholder 1"/>
-          <p:cNvSpPr>
-            <a:spLocks noGrp="1"/>
-          </p:cNvSpPr>
-          <p:nvPr>
-            <p:ph type="body" idx="100"/>
-          </p:nvPr>
-        </p:nvSpPr>
-        <p:spPr/>
-        <p:txBody>
-          <a:bodyPr/>
-          <a:lstStyle/>
-          <a:p>
-            <a:r>
-              <a:t>03</a:t>
-            </a:r>
-          </a:p>
-        </p:txBody>
-      </p:sp>
-      <p:sp>
-        <p:nvSpPr>
-          <p:cNvPr id="3" name="Title 2"/>
-          <p:cNvSpPr>
-            <a:spLocks noGrp="1"/>
-          </p:cNvSpPr>
-          <p:nvPr>
-            <p:ph type="title" idx="101"/>
-          </p:nvPr>
-        </p:nvSpPr>
-        <p:spPr/>
-        <p:txBody>
-          <a:bodyPr/>
-          <a:lstStyle/>
-          <a:p>
-            <a:r>
-              <a:t>교재 4.2–4.3 소요시간과 경로 변화</a:t>
-            </a:r>
-          </a:p>
-        </p:txBody>
-      </p:sp>
-      <p:sp>
-        <p:nvSpPr>
-          <p:cNvPr id="4" name="Text Placeholder 3"/>
-          <p:cNvSpPr>
-            <a:spLocks noGrp="1"/>
-          </p:cNvSpPr>
-          <p:nvPr>
-            <p:ph type="body" idx="102"/>
-          </p:nvPr>
-        </p:nvSpPr>
-        <p:spPr/>
-        <p:txBody>
-          <a:bodyPr/>
-          <a:lstStyle/>
-          <a:p>
-            <a:pPr>
-              <a:spcAft>
-                <a:spcPts val="1000"/>
-              </a:spcAft>
-            </a:pPr>
-            <a:r>
-              <a:rPr>
-                <a:solidFill>
-                  <a:srgbClr val="AFAFAF"/>
-                </a:solidFill>
-              </a:rPr>
-              <a:t>3.1  </a:t>
-            </a:r>
-            <a:r>
-              <a:t>시간대별 소요시간</a:t>
-            </a:r>
-          </a:p>
-          <a:p>
-            <a:pPr>
-              <a:spcAft>
-                <a:spcPts val="1000"/>
-              </a:spcAft>
-            </a:pPr>
-            <a:r>
-              <a:rPr>
-                <a:solidFill>
-                  <a:srgbClr val="AFAFAF"/>
-                </a:solidFill>
-              </a:rPr>
-              <a:t>3.2  </a:t>
-            </a:r>
-            <a:r>
-              <a:t>경로 자체의 변화</a:t>
-            </a:r>
           </a:p>
         </p:txBody>
       </p:sp>
